--- a/캡스톤 디자인 1/202363046_백인원(개인아이디어).pptx
+++ b/캡스톤 디자인 1/202363046_백인원(개인아이디어).pptx
@@ -25,15 +25,16 @@
     <p:embeddedFont>
       <p:font typeface="Amasis MT Pro Black" panose="02040A04050005020304" pitchFamily="18" charset="0"/>
       <p:bold r:id="rId13"/>
+      <p:boldItalic r:id="rId14"/>
     </p:embeddedFont>
     <p:embeddedFont>
       <p:font typeface="Neo둥근모" panose="02010509060201040203" pitchFamily="1" charset="-127"/>
-      <p:regular r:id="rId14"/>
+      <p:regular r:id="rId15"/>
     </p:embeddedFont>
     <p:embeddedFont>
       <p:font typeface="맑은 고딕" panose="020B0503020000020004" pitchFamily="50" charset="-127"/>
-      <p:regular r:id="rId15"/>
-      <p:bold r:id="rId16"/>
+      <p:regular r:id="rId16"/>
+      <p:bold r:id="rId17"/>
     </p:embeddedFont>
   </p:embeddedFontLst>
   <p:defaultTextStyle>
@@ -131,6 +132,11 @@
       </a:defRPr>
     </a:lvl9pPr>
   </p:defaultTextStyle>
+  <p:extLst>
+    <p:ext uri="{EFAFB233-063F-42B5-8137-9DF3F51BA10A}">
+      <p15:sldGuideLst xmlns:p15="http://schemas.microsoft.com/office/powerpoint/2012/main"/>
+    </p:ext>
+  </p:extLst>
 </p:presentation>
 </file>
 
@@ -216,7 +222,7 @@
           <a:p>
             <a:fld id="{CB13F6A5-330D-4BCD-ADE2-A96A276BDFF5}" type="datetimeFigureOut">
               <a:rPr lang="ko-KR" altLang="en-US" smtClean="0"/>
-              <a:t>2026-03-29</a:t>
+              <a:t>2026-04-02</a:t>
             </a:fld>
             <a:endParaRPr lang="ko-KR" altLang="en-US"/>
           </a:p>
@@ -529,15 +535,7 @@
           <a:p>
             <a:r>
               <a:rPr lang="ko-KR" altLang="en-US" dirty="0"/>
-              <a:t>반갑다 </a:t>
-            </a:r>
-            <a:r>
-              <a:rPr lang="ko-KR" altLang="en-US" dirty="0" err="1"/>
-              <a:t>캡스톤</a:t>
-            </a:r>
-            <a:r>
-              <a:rPr lang="ko-KR" altLang="en-US" dirty="0"/>
-              <a:t> 개인 아이디어 발표를 하게 된 백인원이라고 한다</a:t>
+              <a:t>안녕하세요 백인원입니다</a:t>
             </a:r>
             <a:r>
               <a:rPr lang="en-US" altLang="ko-KR" dirty="0"/>
@@ -547,15 +545,7 @@
           <a:p>
             <a:r>
               <a:rPr lang="ko-KR" altLang="en-US" dirty="0"/>
-              <a:t>내가 발표할 </a:t>
-            </a:r>
-            <a:r>
-              <a:rPr lang="ko-KR" altLang="en-US" dirty="0" err="1"/>
-              <a:t>캡스톤</a:t>
-            </a:r>
-            <a:r>
-              <a:rPr lang="ko-KR" altLang="en-US" dirty="0"/>
-              <a:t> 아이디어는 동물 매개 질병 판단 알고리즘이다</a:t>
+              <a:t>제가 발표할 아이디어는 동물 매개 질병 판단 알고리즘입니다</a:t>
             </a:r>
             <a:r>
               <a:rPr lang="en-US" altLang="ko-KR" dirty="0"/>
@@ -765,74 +755,12 @@
           <a:p>
             <a:r>
               <a:rPr lang="ko-KR" altLang="en-US" dirty="0"/>
-              <a:t>군 전역 전 동기의 권유로 주식을 하게 </a:t>
-            </a:r>
-            <a:r>
-              <a:rPr lang="ko-KR" altLang="en-US" dirty="0" err="1"/>
-              <a:t>된적이</a:t>
-            </a:r>
-            <a:r>
-              <a:rPr lang="ko-KR" altLang="en-US" dirty="0"/>
-              <a:t> 있다</a:t>
+              <a:t>최근의 동물 백신 종목에 투자를 하게 되었는데 아프리카 돼지 열병 백신을 개발하는 회사였다</a:t>
             </a:r>
             <a:r>
               <a:rPr lang="en-US" altLang="ko-KR" dirty="0"/>
               <a:t>.</a:t>
             </a:r>
-          </a:p>
-          <a:p>
-            <a:r>
-              <a:rPr lang="ko-KR" altLang="en-US" dirty="0"/>
-              <a:t>종목은 동물관련 백신 개발 회사로 아프리카 돼지 열병의 백신을 만드는 회사였다</a:t>
-            </a:r>
-            <a:r>
-              <a:rPr lang="en-US" altLang="ko-KR" dirty="0"/>
-              <a:t>.</a:t>
-            </a:r>
-          </a:p>
-          <a:p>
-            <a:r>
-              <a:rPr lang="en-US" altLang="ko-KR" dirty="0"/>
-              <a:t>25</a:t>
-            </a:r>
-            <a:r>
-              <a:rPr lang="ko-KR" altLang="en-US" dirty="0"/>
-              <a:t>년 안에 만원을 뚫는다는 동기의 간악한 속임수에 넘어가 </a:t>
-            </a:r>
-            <a:r>
-              <a:rPr lang="en-US" altLang="ko-KR" dirty="0"/>
-              <a:t>200</a:t>
-            </a:r>
-            <a:r>
-              <a:rPr lang="ko-KR" altLang="en-US" dirty="0"/>
-              <a:t>만원을 투자한 나는</a:t>
-            </a:r>
-            <a:endParaRPr lang="en-US" altLang="ko-KR" dirty="0"/>
-          </a:p>
-          <a:p>
-            <a:r>
-              <a:rPr lang="en-US" altLang="ko-KR" dirty="0"/>
-              <a:t>1</a:t>
-            </a:r>
-            <a:r>
-              <a:rPr lang="ko-KR" altLang="en-US" dirty="0"/>
-              <a:t>년째 오르지 않는 차트에 눈물을 머금고 </a:t>
-            </a:r>
-            <a:r>
-              <a:rPr lang="ko-KR" altLang="en-US" dirty="0" err="1"/>
-              <a:t>손절을</a:t>
-            </a:r>
-            <a:r>
-              <a:rPr lang="ko-KR" altLang="en-US" dirty="0"/>
-              <a:t> 할 수 밖에 없었다</a:t>
-            </a:r>
-            <a:r>
-              <a:rPr lang="en-US" altLang="ko-KR" dirty="0"/>
-              <a:t>.</a:t>
-            </a:r>
-          </a:p>
-          <a:p>
-            <a:endParaRPr lang="en-US" altLang="ko-KR" dirty="0"/>
           </a:p>
         </p:txBody>
       </p:sp>
@@ -936,7 +864,7 @@
           <a:p>
             <a:r>
               <a:rPr lang="ko-KR" altLang="en-US" dirty="0"/>
-              <a:t>그러던 와중 난생 처음 들어본 아프리카 돼지 열병이라는 동물 매개 전염병에 관심을 가지게 되었다</a:t>
+              <a:t>그런데 아프리카 돼지 열병이라는 동물 매개 전염병은 난생 처음 들어보았다</a:t>
             </a:r>
             <a:r>
               <a:rPr lang="en-US" altLang="ko-KR" dirty="0"/>
@@ -946,7 +874,7 @@
           <a:p>
             <a:r>
               <a:rPr lang="ko-KR" altLang="en-US" dirty="0"/>
-              <a:t>알지도 못하고 투자를 할 수 없는 나는 아프리카 돼지 열병에 대해서 찾아보았고 이것이 백신이 없는</a:t>
+              <a:t>알지도 못한 상태에서 투자를 할 수 없는 나는 아프리카 돼지 열병에 대해서 찾아보았고 이것이 백신이 없는</a:t>
             </a:r>
             <a:endParaRPr lang="en-US" altLang="ko-KR" dirty="0"/>
           </a:p>
@@ -1076,25 +1004,7 @@
             </a:r>
             <a:r>
               <a:rPr lang="ko-KR" altLang="en-US" dirty="0"/>
-              <a:t> 하며 방역 </a:t>
-            </a:r>
-            <a:r>
-              <a:rPr lang="ko-KR" altLang="en-US" dirty="0" err="1"/>
-              <a:t>조치등으로</a:t>
-            </a:r>
-            <a:r>
-              <a:rPr lang="ko-KR" altLang="en-US" dirty="0"/>
-              <a:t> 인한 이동 제한 등 농가에 큰 피해를 끼치게 된다</a:t>
-            </a:r>
-            <a:r>
-              <a:rPr lang="en-US" altLang="ko-KR" dirty="0"/>
-              <a:t>. </a:t>
-            </a:r>
-          </a:p>
-          <a:p>
-            <a:r>
-              <a:rPr lang="ko-KR" altLang="en-US" dirty="0"/>
-              <a:t>아무래도 가축을 기르는 농장에 수만 마리의 살처분은 매우 큰 손해이다</a:t>
+              <a:t> 하며 이동 제한 등 농가에 큰 피해를 끼치게 된다</a:t>
             </a:r>
             <a:r>
               <a:rPr lang="en-US" altLang="ko-KR" dirty="0"/>
@@ -1234,7 +1144,14 @@
             </a:r>
             <a:r>
               <a:rPr lang="ko-KR" altLang="en-US" dirty="0"/>
-              <a:t>방역기관에 신고한다</a:t>
+              <a:t>방역기관에 신고하고 후속조치가 이뤄진다</a:t>
+            </a:r>
+            <a:endParaRPr lang="en-US" altLang="ko-KR" dirty="0"/>
+          </a:p>
+          <a:p>
+            <a:r>
+              <a:rPr lang="ko-KR" altLang="en-US" dirty="0"/>
+              <a:t>여기서 문제가 발생한다</a:t>
             </a:r>
             <a:r>
               <a:rPr lang="en-US" altLang="ko-KR" dirty="0"/>
@@ -1244,52 +1161,6 @@
           <a:p>
             <a:r>
               <a:rPr lang="ko-KR" altLang="en-US" dirty="0"/>
-              <a:t>신고된 농장은 이동제한 등 방역조치가 이뤄지며</a:t>
-            </a:r>
-            <a:r>
-              <a:rPr lang="en-US" altLang="ko-KR" dirty="0"/>
-              <a:t>, </a:t>
-            </a:r>
-            <a:r>
-              <a:rPr lang="ko-KR" altLang="en-US" dirty="0"/>
-              <a:t>가축방역관이 현지에 급파되어 역학조사 및 시료 채취를 하게 된다</a:t>
-            </a:r>
-            <a:r>
-              <a:rPr lang="en-US" altLang="ko-KR" dirty="0"/>
-              <a:t>.</a:t>
-            </a:r>
-          </a:p>
-          <a:p>
-            <a:r>
-              <a:rPr lang="ko-KR" altLang="en-US" dirty="0"/>
-              <a:t>이후 방역조치가 완료되어도 일정기간 동안 지속적으로 감시하여 </a:t>
-            </a:r>
-            <a:r>
-              <a:rPr lang="ko-KR" altLang="en-US" dirty="0" err="1"/>
-              <a:t>재발생</a:t>
-            </a:r>
-            <a:r>
-              <a:rPr lang="ko-KR" altLang="en-US" dirty="0"/>
-              <a:t> 여부를 확인한다</a:t>
-            </a:r>
-            <a:r>
-              <a:rPr lang="en-US" altLang="ko-KR" dirty="0"/>
-              <a:t>.</a:t>
-            </a:r>
-          </a:p>
-          <a:p>
-            <a:r>
-              <a:rPr lang="ko-KR" altLang="en-US" dirty="0"/>
-              <a:t>여기서 문제가 발생한다</a:t>
-            </a:r>
-            <a:r>
-              <a:rPr lang="en-US" altLang="ko-KR" dirty="0"/>
-              <a:t>.</a:t>
-            </a:r>
-          </a:p>
-          <a:p>
-            <a:r>
-              <a:rPr lang="ko-KR" altLang="en-US" dirty="0"/>
               <a:t>이미 전염병으로 폐사한 가축이 있어야 전염병이 돌고 있다 판단할 수 있기 때문에 </a:t>
             </a:r>
             <a:endParaRPr lang="en-US" altLang="ko-KR" dirty="0"/>
@@ -1298,16 +1169,6 @@
             <a:r>
               <a:rPr lang="ko-KR" altLang="en-US" dirty="0"/>
               <a:t>신고가 늦어질 뿐만 아니라 만약 그전에 확인한다고 하더라도 그 많은 가축들을 하나하나 눈으로 확인할 수가 없다</a:t>
-            </a:r>
-            <a:r>
-              <a:rPr lang="en-US" altLang="ko-KR" dirty="0"/>
-              <a:t>.</a:t>
-            </a:r>
-          </a:p>
-          <a:p>
-            <a:r>
-              <a:rPr lang="ko-KR" altLang="en-US" dirty="0"/>
-              <a:t>따라서 이를 해결할 해결책이 없을까 고민해봤다</a:t>
             </a:r>
             <a:r>
               <a:rPr lang="en-US" altLang="ko-KR" dirty="0"/>
@@ -1452,15 +1313,7 @@
           <a:p>
             <a:r>
               <a:rPr lang="ko-KR" altLang="en-US" dirty="0"/>
-              <a:t>이로 인해 수많은 가축이 </a:t>
-            </a:r>
-            <a:r>
-              <a:rPr lang="ko-KR" altLang="en-US" dirty="0" err="1"/>
-              <a:t>살처분</a:t>
-            </a:r>
-            <a:r>
-              <a:rPr lang="ko-KR" altLang="en-US" dirty="0"/>
-              <a:t> 되어 농가에 피해가 크다</a:t>
+              <a:t>이로 인해 수많은 가축이 살처분이 된다</a:t>
             </a:r>
             <a:r>
               <a:rPr lang="en-US" altLang="ko-KR" dirty="0"/>
@@ -1470,7 +1323,7 @@
           <a:p>
             <a:r>
               <a:rPr lang="ko-KR" altLang="en-US" dirty="0"/>
-              <a:t>따라서 동물 매개 질병에 걸린 가축을 빠르게 판단하여 농림축산검역본부에 신고할 수 있는 알고리즘이 필요하다</a:t>
+              <a:t>따라서 감염을 빠르게 판단하고 신고할 수 있는 알고리즘이 필요하다</a:t>
             </a:r>
             <a:endParaRPr lang="en-US" altLang="ko-KR" dirty="0"/>
           </a:p>
@@ -1592,11 +1445,8 @@
           <a:p>
             <a:r>
               <a:rPr lang="ko-KR" altLang="en-US" dirty="0"/>
-              <a:t>먼저 가축 중 돼지의 아프리카 돼지 열병 감염 여부를 판단하기 위해</a:t>
-            </a:r>
-            <a:endParaRPr lang="en-US" altLang="ko-KR" dirty="0"/>
-          </a:p>
-          <a:p>
+              <a:t>먼저 돼지를 예를 들자면 </a:t>
+            </a:r>
             <a:r>
               <a:rPr lang="en-US" altLang="ko-KR" dirty="0"/>
               <a:t>CCTV</a:t>
@@ -1665,7 +1515,11 @@
           <a:p>
             <a:r>
               <a:rPr lang="ko-KR" altLang="en-US" dirty="0"/>
-              <a:t>등 외형적으로 판단할 수 있는 조건으로 감염 여부를 판단하여 고위험군으로 판단될 시 사용자에게 알림을 보내고</a:t>
+              <a:t>등 외형적으로 판단할 수 있는 조건으로 감염 여부를 판단하여 고위험군으로 판단될 시 사용자에게 알림을 </a:t>
+            </a:r>
+            <a:r>
+              <a:rPr lang="ko-KR" altLang="en-US" dirty="0" err="1"/>
+              <a:t>보낸후</a:t>
             </a:r>
             <a:endParaRPr lang="en-US" altLang="ko-KR" dirty="0"/>
           </a:p>
@@ -1676,7 +1530,7 @@
             </a:r>
             <a:r>
               <a:rPr lang="en-US" altLang="ko-KR" dirty="0"/>
-              <a:t>.</a:t>
+              <a:t>. </a:t>
             </a:r>
           </a:p>
         </p:txBody>
@@ -1800,23 +1654,12 @@
           </a:p>
           <a:p>
             <a:r>
-              <a:rPr lang="ko-KR" altLang="en-US" dirty="0"/>
-              <a:t>정상적인 가축과 전염병의 걸린 가축의 이미지 데이터를 토대로 </a:t>
-            </a:r>
-            <a:r>
               <a:rPr lang="en-US" altLang="ko-KR" dirty="0"/>
               <a:t>YOLO</a:t>
             </a:r>
             <a:r>
               <a:rPr lang="ko-KR" altLang="en-US" dirty="0"/>
-              <a:t>알고리즘을 통해 학습시켜</a:t>
-            </a:r>
-            <a:endParaRPr lang="en-US" altLang="ko-KR" dirty="0"/>
-          </a:p>
-          <a:p>
-            <a:r>
-              <a:rPr lang="ko-KR" altLang="en-US" dirty="0"/>
-              <a:t>가축의 이미지를 판단하고 </a:t>
+              <a:t>알고리즘 </a:t>
             </a:r>
             <a:endParaRPr lang="en-US" altLang="ko-KR" dirty="0"/>
           </a:p>
@@ -1845,6 +1688,9 @@
               <a:rPr lang="en-US" altLang="ko-KR" dirty="0"/>
               <a:t>.</a:t>
             </a:r>
+          </a:p>
+          <a:p>
+            <a:endParaRPr lang="en-US" altLang="ko-KR" dirty="0"/>
           </a:p>
           <a:p>
             <a:endParaRPr lang="en-US" altLang="ko-KR" dirty="0"/>
@@ -2184,7 +2030,7 @@
           <a:p>
             <a:fld id="{58B3455C-41A7-4BF9-9867-48CFDF80CCB1}" type="datetimeFigureOut">
               <a:rPr lang="ko-KR" altLang="en-US" smtClean="0"/>
-              <a:t>2026-03-29</a:t>
+              <a:t>2026-04-02</a:t>
             </a:fld>
             <a:endParaRPr lang="ko-KR" altLang="en-US"/>
           </a:p>
@@ -2382,7 +2228,7 @@
           <a:p>
             <a:fld id="{58B3455C-41A7-4BF9-9867-48CFDF80CCB1}" type="datetimeFigureOut">
               <a:rPr lang="ko-KR" altLang="en-US" smtClean="0"/>
-              <a:t>2026-03-29</a:t>
+              <a:t>2026-04-02</a:t>
             </a:fld>
             <a:endParaRPr lang="ko-KR" altLang="en-US"/>
           </a:p>
@@ -2590,7 +2436,7 @@
           <a:p>
             <a:fld id="{58B3455C-41A7-4BF9-9867-48CFDF80CCB1}" type="datetimeFigureOut">
               <a:rPr lang="ko-KR" altLang="en-US" smtClean="0"/>
-              <a:t>2026-03-29</a:t>
+              <a:t>2026-04-02</a:t>
             </a:fld>
             <a:endParaRPr lang="ko-KR" altLang="en-US"/>
           </a:p>
@@ -2788,7 +2634,7 @@
           <a:p>
             <a:fld id="{58B3455C-41A7-4BF9-9867-48CFDF80CCB1}" type="datetimeFigureOut">
               <a:rPr lang="ko-KR" altLang="en-US" smtClean="0"/>
-              <a:t>2026-03-29</a:t>
+              <a:t>2026-04-02</a:t>
             </a:fld>
             <a:endParaRPr lang="ko-KR" altLang="en-US"/>
           </a:p>
@@ -3063,7 +2909,7 @@
           <a:p>
             <a:fld id="{58B3455C-41A7-4BF9-9867-48CFDF80CCB1}" type="datetimeFigureOut">
               <a:rPr lang="ko-KR" altLang="en-US" smtClean="0"/>
-              <a:t>2026-03-29</a:t>
+              <a:t>2026-04-02</a:t>
             </a:fld>
             <a:endParaRPr lang="ko-KR" altLang="en-US"/>
           </a:p>
@@ -3328,7 +3174,7 @@
           <a:p>
             <a:fld id="{58B3455C-41A7-4BF9-9867-48CFDF80CCB1}" type="datetimeFigureOut">
               <a:rPr lang="ko-KR" altLang="en-US" smtClean="0"/>
-              <a:t>2026-03-29</a:t>
+              <a:t>2026-04-02</a:t>
             </a:fld>
             <a:endParaRPr lang="ko-KR" altLang="en-US"/>
           </a:p>
@@ -3740,7 +3586,7 @@
           <a:p>
             <a:fld id="{58B3455C-41A7-4BF9-9867-48CFDF80CCB1}" type="datetimeFigureOut">
               <a:rPr lang="ko-KR" altLang="en-US" smtClean="0"/>
-              <a:t>2026-03-29</a:t>
+              <a:t>2026-04-02</a:t>
             </a:fld>
             <a:endParaRPr lang="ko-KR" altLang="en-US"/>
           </a:p>
@@ -3881,7 +3727,7 @@
           <a:p>
             <a:fld id="{58B3455C-41A7-4BF9-9867-48CFDF80CCB1}" type="datetimeFigureOut">
               <a:rPr lang="ko-KR" altLang="en-US" smtClean="0"/>
-              <a:t>2026-03-29</a:t>
+              <a:t>2026-04-02</a:t>
             </a:fld>
             <a:endParaRPr lang="ko-KR" altLang="en-US"/>
           </a:p>
@@ -3994,7 +3840,7 @@
           <a:p>
             <a:fld id="{58B3455C-41A7-4BF9-9867-48CFDF80CCB1}" type="datetimeFigureOut">
               <a:rPr lang="ko-KR" altLang="en-US" smtClean="0"/>
-              <a:t>2026-03-29</a:t>
+              <a:t>2026-04-02</a:t>
             </a:fld>
             <a:endParaRPr lang="ko-KR" altLang="en-US"/>
           </a:p>
@@ -4305,7 +4151,7 @@
           <a:p>
             <a:fld id="{58B3455C-41A7-4BF9-9867-48CFDF80CCB1}" type="datetimeFigureOut">
               <a:rPr lang="ko-KR" altLang="en-US" smtClean="0"/>
-              <a:t>2026-03-29</a:t>
+              <a:t>2026-04-02</a:t>
             </a:fld>
             <a:endParaRPr lang="ko-KR" altLang="en-US"/>
           </a:p>
@@ -4593,7 +4439,7 @@
           <a:p>
             <a:fld id="{58B3455C-41A7-4BF9-9867-48CFDF80CCB1}" type="datetimeFigureOut">
               <a:rPr lang="ko-KR" altLang="en-US" smtClean="0"/>
-              <a:t>2026-03-29</a:t>
+              <a:t>2026-04-02</a:t>
             </a:fld>
             <a:endParaRPr lang="ko-KR" altLang="en-US"/>
           </a:p>
@@ -4834,7 +4680,7 @@
           <a:p>
             <a:fld id="{58B3455C-41A7-4BF9-9867-48CFDF80CCB1}" type="datetimeFigureOut">
               <a:rPr lang="ko-KR" altLang="en-US" smtClean="0"/>
-              <a:t>2026-03-29</a:t>
+              <a:t>2026-04-02</a:t>
             </a:fld>
             <a:endParaRPr lang="ko-KR" altLang="en-US"/>
           </a:p>
